--- a/generated/Tier 1 Broker Scorecards/Aspire Insurance Brokerage LLC_Broker_Scorecard.pptx
+++ b/generated/Tier 1 Broker Scorecards/Aspire Insurance Brokerage LLC_Broker_Scorecard.pptx
@@ -3357,7 +3357,7 @@
                         <a:rPr sz="800">
                           <a:latin typeface="Segoe UI"/>
                         </a:rPr>
-                        <a:t>$1,352,271.64 / $1,516,860.73 / $164,589.09</a:t>
+                        <a:t>$1,352,271.64 / $1,537,767.10 / $185,495.46</a:t>
                       </a:r>
                     </a:p>
                   </a:txBody>
@@ -3394,7 +3394,7 @@
                         <a:rPr sz="900">
                           <a:latin typeface="Segoe UI"/>
                         </a:rPr>
-                        <a:t>Tier 1  |  5.14% / 15.00%</a:t>
+                        <a:t>Tier 1  |  5.49% / 15.00%</a:t>
                       </a:r>
                     </a:p>
                   </a:txBody>
@@ -3431,7 +3431,7 @@
                         <a:rPr sz="900">
                           <a:latin typeface="Segoe UI"/>
                         </a:rPr>
-                        <a:t>$1,893,180.30  (8.7% achieved)</a:t>
+                        <a:t>$1,893,180.30  (9.8% achieved)</a:t>
                       </a:r>
                     </a:p>
                   </a:txBody>
@@ -3766,7 +3766,7 @@
                         <a:rPr sz="900">
                           <a:latin typeface="Segoe UI"/>
                         </a:rPr>
-                        <a:t>Non-Fleet Subs: 239  |  Binds: 13</a:t>
+                        <a:t>Non-Fleet Subs: 241  |  Binds: 14</a:t>
                       </a:r>
                     </a:p>
                   </a:txBody>
@@ -3803,7 +3803,7 @@
                         <a:rPr sz="900">
                           <a:latin typeface="Segoe UI"/>
                         </a:rPr>
-                        <a:t>Non-Fleet Bound Premium: $164,589.09</a:t>
+                        <a:t>Non-Fleet Bound Premium: $185,495.46</a:t>
                       </a:r>
                     </a:p>
                   </a:txBody>
@@ -4425,7 +4425,7 @@
                           </a:solidFill>
                           <a:latin typeface="Segoe UI"/>
                         </a:rPr>
-                        <a:t>43</a:t>
+                        <a:t>45</a:t>
                       </a:r>
                     </a:p>
                   </a:txBody>
@@ -4701,7 +4701,7 @@
                           </a:solidFill>
                           <a:latin typeface="Segoe UI"/>
                         </a:rPr>
-                        <a:t>4.7%</a:t>
+                        <a:t>6.7%</a:t>
                       </a:r>
                     </a:p>
                   </a:txBody>
@@ -4741,7 +4741,7 @@
                         <a:rPr sz="800">
                           <a:latin typeface="Segoe UI"/>
                         </a:rPr>
-                        <a:t>21.6%</a:t>
+                        <a:t>23.0%</a:t>
                       </a:r>
                     </a:p>
                   </a:txBody>
@@ -4969,12 +4969,9 @@
                       <a:pPr algn="ctr"/>
                       <a:r>
                         <a:rPr sz="800">
-                          <a:solidFill>
-                            <a:srgbClr val="DC2626"/>
-                          </a:solidFill>
                           <a:latin typeface="Segoe UI"/>
                         </a:rPr>
-                        <a:t>2</a:t>
+                        <a:t>3</a:t>
                       </a:r>
                     </a:p>
                   </a:txBody>
@@ -5011,7 +5008,7 @@
                         <a:rPr sz="800">
                           <a:latin typeface="Segoe UI"/>
                         </a:rPr>
-                        <a:t>16</a:t>
+                        <a:t>17</a:t>
                       </a:r>
                     </a:p>
                   </a:txBody>
@@ -5250,7 +5247,7 @@
                           </a:solidFill>
                           <a:latin typeface="Segoe UI"/>
                         </a:rPr>
-                        <a:t>$38.8K</a:t>
+                        <a:t>$59.7K</a:t>
                       </a:r>
                     </a:p>
                   </a:txBody>

--- a/generated/Tier 1 Broker Scorecards/Aspire Insurance Brokerage LLC_Broker_Scorecard.pptx
+++ b/generated/Tier 1 Broker Scorecards/Aspire Insurance Brokerage LLC_Broker_Scorecard.pptx
@@ -3394,7 +3394,7 @@
                         <a:rPr sz="900">
                           <a:latin typeface="Segoe UI"/>
                         </a:rPr>
-                        <a:t>Tier 1  |  5.49% / 15.00%</a:t>
+                        <a:t>Tier 1  |  4.71% / 15.00%</a:t>
                       </a:r>
                     </a:p>
                   </a:txBody>
@@ -3766,7 +3766,7 @@
                         <a:rPr sz="900">
                           <a:latin typeface="Segoe UI"/>
                         </a:rPr>
-                        <a:t>Non-Fleet Subs: 241  |  Binds: 14</a:t>
+                        <a:t>Non-Fleet Subs: 241  |  Binds: 12</a:t>
                       </a:r>
                     </a:p>
                   </a:txBody>
@@ -4425,7 +4425,7 @@
                           </a:solidFill>
                           <a:latin typeface="Segoe UI"/>
                         </a:rPr>
-                        <a:t>45</a:t>
+                        <a:t>46</a:t>
                       </a:r>
                     </a:p>
                   </a:txBody>
@@ -4701,7 +4701,7 @@
                           </a:solidFill>
                           <a:latin typeface="Segoe UI"/>
                         </a:rPr>
-                        <a:t>6.7%</a:t>
+                        <a:t>4.3%</a:t>
                       </a:r>
                     </a:p>
                   </a:txBody>
@@ -4969,9 +4969,12 @@
                       <a:pPr algn="ctr"/>
                       <a:r>
                         <a:rPr sz="800">
+                          <a:solidFill>
+                            <a:srgbClr val="DC2626"/>
+                          </a:solidFill>
                           <a:latin typeface="Segoe UI"/>
                         </a:rPr>
-                        <a:t>3</a:t>
+                        <a:t>2</a:t>
                       </a:r>
                     </a:p>
                   </a:txBody>

--- a/generated/Tier 1 Broker Scorecards/Aspire Insurance Brokerage LLC_Broker_Scorecard.pptx
+++ b/generated/Tier 1 Broker Scorecards/Aspire Insurance Brokerage LLC_Broker_Scorecard.pptx
@@ -4425,7 +4425,7 @@
                           </a:solidFill>
                           <a:latin typeface="Segoe UI"/>
                         </a:rPr>
-                        <a:t>46</a:t>
+                        <a:t>47</a:t>
                       </a:r>
                     </a:p>
                   </a:txBody>

--- a/generated/Tier 1 Broker Scorecards/Aspire Insurance Brokerage LLC_Broker_Scorecard.pptx
+++ b/generated/Tier 1 Broker Scorecards/Aspire Insurance Brokerage LLC_Broker_Scorecard.pptx
@@ -3394,7 +3394,7 @@
                         <a:rPr sz="900">
                           <a:latin typeface="Segoe UI"/>
                         </a:rPr>
-                        <a:t>Tier 1  |  4.71% / 15.00%</a:t>
+                        <a:t>Tier 1  |  4.67% / 15.00%</a:t>
                       </a:r>
                     </a:p>
                   </a:txBody>
@@ -3766,7 +3766,7 @@
                         <a:rPr sz="900">
                           <a:latin typeface="Segoe UI"/>
                         </a:rPr>
-                        <a:t>Non-Fleet Subs: 241  |  Binds: 12</a:t>
+                        <a:t>Non-Fleet Subs: 243  |  Binds: 12</a:t>
                       </a:r>
                     </a:p>
                   </a:txBody>
@@ -4425,7 +4425,7 @@
                           </a:solidFill>
                           <a:latin typeface="Segoe UI"/>
                         </a:rPr>
-                        <a:t>47</a:t>
+                        <a:t>49</a:t>
                       </a:r>
                     </a:p>
                   </a:txBody>
@@ -4701,7 +4701,7 @@
                           </a:solidFill>
                           <a:latin typeface="Segoe UI"/>
                         </a:rPr>
-                        <a:t>4.3%</a:t>
+                        <a:t>4.1%</a:t>
                       </a:r>
                     </a:p>
                   </a:txBody>
@@ -4741,7 +4741,7 @@
                         <a:rPr sz="800">
                           <a:latin typeface="Segoe UI"/>
                         </a:rPr>
-                        <a:t>23.0%</a:t>
+                        <a:t>21.6%</a:t>
                       </a:r>
                     </a:p>
                   </a:txBody>
@@ -5011,7 +5011,7 @@
                         <a:rPr sz="800">
                           <a:latin typeface="Segoe UI"/>
                         </a:rPr>
-                        <a:t>17</a:t>
+                        <a:t>16</a:t>
                       </a:r>
                     </a:p>
                   </a:txBody>

--- a/generated/Tier 1 Broker Scorecards/Aspire Insurance Brokerage LLC_Broker_Scorecard.pptx
+++ b/generated/Tier 1 Broker Scorecards/Aspire Insurance Brokerage LLC_Broker_Scorecard.pptx
@@ -3357,7 +3357,7 @@
                         <a:rPr sz="800">
                           <a:latin typeface="Segoe UI"/>
                         </a:rPr>
-                        <a:t>$1,352,271.64 / $1,537,767.10 / $185,495.46</a:t>
+                        <a:t>$1,352,271.64 / $1,560,852.04 / $208,580.40</a:t>
                       </a:r>
                     </a:p>
                   </a:txBody>
@@ -3394,7 +3394,7 @@
                         <a:rPr sz="900">
                           <a:latin typeface="Segoe UI"/>
                         </a:rPr>
-                        <a:t>Tier 1  |  4.67% / 15.00%</a:t>
+                        <a:t>Tier 1  |  5.06% / 15.00%</a:t>
                       </a:r>
                     </a:p>
                   </a:txBody>
@@ -3431,7 +3431,7 @@
                         <a:rPr sz="900">
                           <a:latin typeface="Segoe UI"/>
                         </a:rPr>
-                        <a:t>$1,893,180.30  (9.8% achieved)</a:t>
+                        <a:t>$1,893,180.30  (11.0% achieved)</a:t>
                       </a:r>
                     </a:p>
                   </a:txBody>
@@ -3766,7 +3766,7 @@
                         <a:rPr sz="900">
                           <a:latin typeface="Segoe UI"/>
                         </a:rPr>
-                        <a:t>Non-Fleet Subs: 243  |  Binds: 12</a:t>
+                        <a:t>Non-Fleet Subs: 243  |  Binds: 13</a:t>
                       </a:r>
                     </a:p>
                   </a:txBody>
@@ -3803,7 +3803,7 @@
                         <a:rPr sz="900">
                           <a:latin typeface="Segoe UI"/>
                         </a:rPr>
-                        <a:t>Non-Fleet Bound Premium: $185,495.46</a:t>
+                        <a:t>Non-Fleet Bound Premium: $208,580.40</a:t>
                       </a:r>
                     </a:p>
                   </a:txBody>
@@ -4425,7 +4425,7 @@
                           </a:solidFill>
                           <a:latin typeface="Segoe UI"/>
                         </a:rPr>
-                        <a:t>49</a:t>
+                        <a:t>51</a:t>
                       </a:r>
                     </a:p>
                   </a:txBody>
@@ -4701,7 +4701,7 @@
                           </a:solidFill>
                           <a:latin typeface="Segoe UI"/>
                         </a:rPr>
-                        <a:t>4.1%</a:t>
+                        <a:t>7.8%</a:t>
                       </a:r>
                     </a:p>
                   </a:txBody>
@@ -4741,7 +4741,7 @@
                         <a:rPr sz="800">
                           <a:latin typeface="Segoe UI"/>
                         </a:rPr>
-                        <a:t>21.6%</a:t>
+                        <a:t>23.0%</a:t>
                       </a:r>
                     </a:p>
                   </a:txBody>
@@ -4970,11 +4970,11 @@
                       <a:r>
                         <a:rPr sz="800">
                           <a:solidFill>
-                            <a:srgbClr val="DC2626"/>
+                            <a:srgbClr val="059669"/>
                           </a:solidFill>
                           <a:latin typeface="Segoe UI"/>
                         </a:rPr>
-                        <a:t>2</a:t>
+                        <a:t>4</a:t>
                       </a:r>
                     </a:p>
                   </a:txBody>
@@ -5011,7 +5011,7 @@
                         <a:rPr sz="800">
                           <a:latin typeface="Segoe UI"/>
                         </a:rPr>
-                        <a:t>16</a:t>
+                        <a:t>17</a:t>
                       </a:r>
                     </a:p>
                   </a:txBody>
@@ -5250,7 +5250,7 @@
                           </a:solidFill>
                           <a:latin typeface="Segoe UI"/>
                         </a:rPr>
-                        <a:t>$59.7K</a:t>
+                        <a:t>$82.8K</a:t>
                       </a:r>
                     </a:p>
                   </a:txBody>

--- a/generated/Tier 1 Broker Scorecards/Aspire Insurance Brokerage LLC_Broker_Scorecard.pptx
+++ b/generated/Tier 1 Broker Scorecards/Aspire Insurance Brokerage LLC_Broker_Scorecard.pptx
@@ -3394,7 +3394,7 @@
                         <a:rPr sz="900">
                           <a:latin typeface="Segoe UI"/>
                         </a:rPr>
-                        <a:t>Tier 1  |  5.06% / 15.00%</a:t>
+                        <a:t>Tier 1  |  5.04% / 15.00%</a:t>
                       </a:r>
                     </a:p>
                   </a:txBody>
@@ -3766,7 +3766,7 @@
                         <a:rPr sz="900">
                           <a:latin typeface="Segoe UI"/>
                         </a:rPr>
-                        <a:t>Non-Fleet Subs: 243  |  Binds: 13</a:t>
+                        <a:t>Non-Fleet Subs: 244  |  Binds: 13</a:t>
                       </a:r>
                     </a:p>
                   </a:txBody>
@@ -4425,7 +4425,7 @@
                           </a:solidFill>
                           <a:latin typeface="Segoe UI"/>
                         </a:rPr>
-                        <a:t>51</a:t>
+                        <a:t>52</a:t>
                       </a:r>
                     </a:p>
                   </a:txBody>
@@ -4701,7 +4701,7 @@
                           </a:solidFill>
                           <a:latin typeface="Segoe UI"/>
                         </a:rPr>
-                        <a:t>7.8%</a:t>
+                        <a:t>7.7%</a:t>
                       </a:r>
                     </a:p>
                   </a:txBody>

--- a/generated/Tier 1 Broker Scorecards/Aspire Insurance Brokerage LLC_Broker_Scorecard.pptx
+++ b/generated/Tier 1 Broker Scorecards/Aspire Insurance Brokerage LLC_Broker_Scorecard.pptx
@@ -3394,7 +3394,7 @@
                         <a:rPr sz="900">
                           <a:latin typeface="Segoe UI"/>
                         </a:rPr>
-                        <a:t>Tier 1  |  5.04% / 15.00%</a:t>
+                        <a:t>Tier 1  |  5.38% / 15.00%</a:t>
                       </a:r>
                     </a:p>
                   </a:txBody>
@@ -3766,7 +3766,7 @@
                         <a:rPr sz="900">
                           <a:latin typeface="Segoe UI"/>
                         </a:rPr>
-                        <a:t>Non-Fleet Subs: 244  |  Binds: 13</a:t>
+                        <a:t>Non-Fleet Subs: 246  |  Binds: 14</a:t>
                       </a:r>
                     </a:p>
                   </a:txBody>
@@ -4425,7 +4425,7 @@
                           </a:solidFill>
                           <a:latin typeface="Segoe UI"/>
                         </a:rPr>
-                        <a:t>52</a:t>
+                        <a:t>54</a:t>
                       </a:r>
                     </a:p>
                   </a:txBody>
@@ -4697,11 +4697,11 @@
                       <a:r>
                         <a:rPr sz="800">
                           <a:solidFill>
-                            <a:srgbClr val="DC2626"/>
+                            <a:srgbClr val="059669"/>
                           </a:solidFill>
                           <a:latin typeface="Segoe UI"/>
                         </a:rPr>
-                        <a:t>7.7%</a:t>
+                        <a:t>9.3%</a:t>
                       </a:r>
                     </a:p>
                   </a:txBody>
@@ -4741,7 +4741,7 @@
                         <a:rPr sz="800">
                           <a:latin typeface="Segoe UI"/>
                         </a:rPr>
-                        <a:t>23.0%</a:t>
+                        <a:t>21.6%</a:t>
                       </a:r>
                     </a:p>
                   </a:txBody>
@@ -4974,7 +4974,7 @@
                           </a:solidFill>
                           <a:latin typeface="Segoe UI"/>
                         </a:rPr>
-                        <a:t>4</a:t>
+                        <a:t>5</a:t>
                       </a:r>
                     </a:p>
                   </a:txBody>
@@ -5011,7 +5011,7 @@
                         <a:rPr sz="800">
                           <a:latin typeface="Segoe UI"/>
                         </a:rPr>
-                        <a:t>17</a:t>
+                        <a:t>16</a:t>
                       </a:r>
                     </a:p>
                   </a:txBody>

--- a/generated/Tier 1 Broker Scorecards/Aspire Insurance Brokerage LLC_Broker_Scorecard.pptx
+++ b/generated/Tier 1 Broker Scorecards/Aspire Insurance Brokerage LLC_Broker_Scorecard.pptx
@@ -3394,7 +3394,7 @@
                         <a:rPr sz="900">
                           <a:latin typeface="Segoe UI"/>
                         </a:rPr>
-                        <a:t>Tier 1  |  5.38% / 15.00%</a:t>
+                        <a:t>Tier 1  |  5.26% / 15.00%</a:t>
                       </a:r>
                     </a:p>
                   </a:txBody>
@@ -3653,7 +3653,7 @@
                         <a:rPr sz="900">
                           <a:latin typeface="Segoe UI"/>
                         </a:rPr>
-                        <a:t>Fleet Subs: 14  |  Binds: 0</a:t>
+                        <a:t>Fleet Subs: 15  |  Binds: 0</a:t>
                       </a:r>
                     </a:p>
                   </a:txBody>
@@ -3766,7 +3766,7 @@
                         <a:rPr sz="900">
                           <a:latin typeface="Segoe UI"/>
                         </a:rPr>
-                        <a:t>Non-Fleet Subs: 246  |  Binds: 14</a:t>
+                        <a:t>Non-Fleet Subs: 251  |  Binds: 14</a:t>
                       </a:r>
                     </a:p>
                   </a:txBody>
@@ -4425,7 +4425,7 @@
                           </a:solidFill>
                           <a:latin typeface="Segoe UI"/>
                         </a:rPr>
-                        <a:t>54</a:t>
+                        <a:t>60</a:t>
                       </a:r>
                     </a:p>
                   </a:txBody>
@@ -4696,12 +4696,9 @@
                       <a:pPr algn="ctr"/>
                       <a:r>
                         <a:rPr sz="800">
-                          <a:solidFill>
-                            <a:srgbClr val="059669"/>
-                          </a:solidFill>
                           <a:latin typeface="Segoe UI"/>
                         </a:rPr>
-                        <a:t>9.3%</a:t>
+                        <a:t>8.3%</a:t>
                       </a:r>
                     </a:p>
                   </a:txBody>
@@ -4741,7 +4738,7 @@
                         <a:rPr sz="800">
                           <a:latin typeface="Segoe UI"/>
                         </a:rPr>
-                        <a:t>21.6%</a:t>
+                        <a:t>23.0%</a:t>
                       </a:r>
                     </a:p>
                   </a:txBody>
@@ -5011,7 +5008,7 @@
                         <a:rPr sz="800">
                           <a:latin typeface="Segoe UI"/>
                         </a:rPr>
-                        <a:t>16</a:t>
+                        <a:t>17</a:t>
                       </a:r>
                     </a:p>
                   </a:txBody>

--- a/generated/Tier 1 Broker Scorecards/Aspire Insurance Brokerage LLC_Broker_Scorecard.pptx
+++ b/generated/Tier 1 Broker Scorecards/Aspire Insurance Brokerage LLC_Broker_Scorecard.pptx
@@ -3357,7 +3357,7 @@
                         <a:rPr sz="800">
                           <a:latin typeface="Segoe UI"/>
                         </a:rPr>
-                        <a:t>$1,352,271.64 / $1,560,852.04 / $208,580.40</a:t>
+                        <a:t>$1,352,271.64 / $1,565,805.38 / $213,533.74</a:t>
                       </a:r>
                     </a:p>
                   </a:txBody>
@@ -3394,7 +3394,7 @@
                         <a:rPr sz="900">
                           <a:latin typeface="Segoe UI"/>
                         </a:rPr>
-                        <a:t>Tier 1  |  5.26% / 15.00%</a:t>
+                        <a:t>Tier 1  |  5.62% / 15.00%</a:t>
                       </a:r>
                     </a:p>
                   </a:txBody>
@@ -3431,7 +3431,7 @@
                         <a:rPr sz="900">
                           <a:latin typeface="Segoe UI"/>
                         </a:rPr>
-                        <a:t>$1,893,180.30  (11.0% achieved)</a:t>
+                        <a:t>$1,893,180.30  (11.3% achieved)</a:t>
                       </a:r>
                     </a:p>
                   </a:txBody>
@@ -3653,7 +3653,7 @@
                         <a:rPr sz="900">
                           <a:latin typeface="Segoe UI"/>
                         </a:rPr>
-                        <a:t>Fleet Subs: 15  |  Binds: 0</a:t>
+                        <a:t>Fleet Subs: 15  |  Binds: 1</a:t>
                       </a:r>
                     </a:p>
                   </a:txBody>
@@ -3690,7 +3690,7 @@
                         <a:rPr sz="900">
                           <a:latin typeface="Segoe UI"/>
                         </a:rPr>
-                        <a:t>Fleet Bound Premium: $0.00</a:t>
+                        <a:t>Fleet Bound Premium: $61,025.31</a:t>
                       </a:r>
                     </a:p>
                   </a:txBody>
@@ -3727,7 +3727,7 @@
                         <a:rPr sz="900">
                           <a:latin typeface="Segoe UI"/>
                         </a:rPr>
-                        <a:t>Fleet Book %: 0.0%</a:t>
+                        <a:t>Fleet Book %: 28.6%</a:t>
                       </a:r>
                     </a:p>
                   </a:txBody>
@@ -3766,7 +3766,7 @@
                         <a:rPr sz="900">
                           <a:latin typeface="Segoe UI"/>
                         </a:rPr>
-                        <a:t>Non-Fleet Subs: 251  |  Binds: 14</a:t>
+                        <a:t>Non-Fleet Subs: 252  |  Binds: 14</a:t>
                       </a:r>
                     </a:p>
                   </a:txBody>
@@ -3803,7 +3803,7 @@
                         <a:rPr sz="900">
                           <a:latin typeface="Segoe UI"/>
                         </a:rPr>
-                        <a:t>Non-Fleet Bound Premium: $208,580.40</a:t>
+                        <a:t>Non-Fleet Bound Premium: $152,508.43</a:t>
                       </a:r>
                     </a:p>
                   </a:txBody>
@@ -3840,7 +3840,7 @@
                         <a:rPr sz="900">
                           <a:latin typeface="Segoe UI"/>
                         </a:rPr>
-                        <a:t>Non-Fleet Book %: 100.0%</a:t>
+                        <a:t>Non-Fleet Book %: 71.4%</a:t>
                       </a:r>
                     </a:p>
                   </a:txBody>
@@ -4425,7 +4425,7 @@
                           </a:solidFill>
                           <a:latin typeface="Segoe UI"/>
                         </a:rPr>
-                        <a:t>60</a:t>
+                        <a:t>61</a:t>
                       </a:r>
                     </a:p>
                   </a:txBody>
@@ -4696,9 +4696,12 @@
                       <a:pPr algn="ctr"/>
                       <a:r>
                         <a:rPr sz="800">
+                          <a:solidFill>
+                            <a:srgbClr val="059669"/>
+                          </a:solidFill>
                           <a:latin typeface="Segoe UI"/>
                         </a:rPr>
-                        <a:t>8.3%</a:t>
+                        <a:t>9.8%</a:t>
                       </a:r>
                     </a:p>
                   </a:txBody>
@@ -4738,7 +4741,7 @@
                         <a:rPr sz="800">
                           <a:latin typeface="Segoe UI"/>
                         </a:rPr>
-                        <a:t>23.0%</a:t>
+                        <a:t>21.6%</a:t>
                       </a:r>
                     </a:p>
                   </a:txBody>
@@ -4971,7 +4974,7 @@
                           </a:solidFill>
                           <a:latin typeface="Segoe UI"/>
                         </a:rPr>
-                        <a:t>5</a:t>
+                        <a:t>6</a:t>
                       </a:r>
                     </a:p>
                   </a:txBody>
@@ -5008,7 +5011,7 @@
                         <a:rPr sz="800">
                           <a:latin typeface="Segoe UI"/>
                         </a:rPr>
-                        <a:t>17</a:t>
+                        <a:t>16</a:t>
                       </a:r>
                     </a:p>
                   </a:txBody>
@@ -5247,7 +5250,7 @@
                           </a:solidFill>
                           <a:latin typeface="Segoe UI"/>
                         </a:rPr>
-                        <a:t>$82.8K</a:t>
+                        <a:t>$87.7K</a:t>
                       </a:r>
                     </a:p>
                   </a:txBody>

--- a/generated/Tier 1 Broker Scorecards/Aspire Insurance Brokerage LLC_Broker_Scorecard.pptx
+++ b/generated/Tier 1 Broker Scorecards/Aspire Insurance Brokerage LLC_Broker_Scorecard.pptx
@@ -3357,7 +3357,7 @@
                         <a:rPr sz="800">
                           <a:latin typeface="Segoe UI"/>
                         </a:rPr>
-                        <a:t>$1,352,271.64 / $1,565,805.38 / $213,533.74</a:t>
+                        <a:t>$1,352,271.64 / $1,547,151.00 / $213,533.74</a:t>
                       </a:r>
                     </a:p>
                   </a:txBody>
